--- a/dataset/guides_final/SW/guide/IT-SW-001_업무용 SW 설치 가이드.pptx
+++ b/dataset/guides_final/SW/guide/IT-SW-001_업무용 SW 설치 가이드.pptx
@@ -3252,7 +3252,7 @@
                 <a:ea typeface="Malgun Gothic"/>
                 <a:cs typeface="Malgun Gothic"/>
               </a:rPr>
-              <a:t>한화시스템 ICT 임직원 IT 안내 · SW·라이선스</a:t>
+              <a:t>가상 ICT 기업 임직원 IT 안내 · SW·라이선스</a:t>
             </a:r>
           </a:p>
         </p:txBody>
@@ -3484,7 +3484,7 @@
                 <a:ea typeface="Malgun Gothic"/>
                 <a:cs typeface="Malgun Gothic"/>
               </a:rPr>
-              <a:t>© HANWHA SYSTEMS ICT · IT-SW-001 · 사내 일반</a:t>
+              <a:t>© 가상 ICT 기업 · IT-SW-001 · 사내 일반</a:t>
             </a:r>
           </a:p>
         </p:txBody>
@@ -5624,7 +5624,7 @@
                 <a:ea typeface="Malgun Gothic"/>
                 <a:cs typeface="Malgun Gothic"/>
               </a:rPr>
-              <a:t>© HANWHA SYSTEMS ICT · IT-SW-001 · 사내 일반</a:t>
+              <a:t>© 가상 ICT 기업 · IT-SW-001 · 사내 일반</a:t>
             </a:r>
           </a:p>
         </p:txBody>
@@ -5872,7 +5872,7 @@
                 <a:ea typeface="Malgun Gothic"/>
                 <a:cs typeface="Malgun Gothic"/>
               </a:rPr>
-              <a:t>© HANWHA SYSTEMS ICT · IT-SW-001 · 사내 일반</a:t>
+              <a:t>© 가상 ICT 기업 · IT-SW-001 · 사내 일반</a:t>
             </a:r>
           </a:p>
         </p:txBody>
@@ -8400,7 +8400,7 @@
                 <a:ea typeface="Malgun Gothic"/>
                 <a:cs typeface="Malgun Gothic"/>
               </a:rPr>
-              <a:t>© HANWHA SYSTEMS ICT · IT-SW-001 · 사내 일반</a:t>
+              <a:t>© 가상 ICT 기업 · IT-SW-001 · 사내 일반</a:t>
             </a:r>
           </a:p>
         </p:txBody>
@@ -9848,7 +9848,7 @@
         <p:spPr>
           <a:xfrm>
             <a:off x="838200" y="3379978"/>
-            <a:ext cx="10769600" cy="414782"/>
+            <a:ext cx="10769600" cy="207391"/>
           </a:xfrm>
           <a:prstGeom prst="rect">
             <a:avLst/>
@@ -9881,31 +9881,7 @@
                 <a:ea typeface="Malgun Gothic"/>
                 <a:cs typeface="Malgun Gothic"/>
               </a:rPr>
-              <a:t>브라우저 주소창에 hanwha-admin.example 을 입력하고 회사 계정(사번)으로 로그인합니다. 사내 IT 포털(hanwha-admin)은 그룹웨어 첫 화면의 [IT 요청]</a:t>
-            </a:r>
-          </a:p>
-          <a:p>
-            <a:pPr algn="l">
-              <a:lnSpc>
-                <a:spcPts val="1632"/>
-              </a:lnSpc>
-              <a:spcBef>
-                <a:spcPts val="0"/>
-              </a:spcBef>
-              <a:spcAft>
-                <a:spcPts val="0"/>
-              </a:spcAft>
-            </a:pPr>
-            <a:r>
-              <a:rPr sz="1150" b="0">
-                <a:solidFill>
-                  <a:srgbClr val="1D2433"/>
-                </a:solidFill>
-                <a:latin typeface="Malgun Gothic"/>
-                <a:ea typeface="Malgun Gothic"/>
-                <a:cs typeface="Malgun Gothic"/>
-              </a:rPr>
-              <a:t>바로가기로도 들어갑니다.</a:t>
+              <a:t>브라우저 주소창에 portal.ict.example 을 입력하고 회사 계정(사번)으로 로그인합니다. 사내 IT 포털은 그룹웨어 첫 화면의 [IT 요청] 바로가기로도 들어갑니다.</a:t>
             </a:r>
           </a:p>
         </p:txBody>
@@ -9918,7 +9894,7 @@
         </p:nvSpPr>
         <p:spPr>
           <a:xfrm>
-            <a:off x="635000" y="3826510"/>
+            <a:off x="635000" y="3619119"/>
             <a:ext cx="203200" cy="207391"/>
           </a:xfrm>
           <a:prstGeom prst="rect">
@@ -9965,7 +9941,7 @@
         </p:nvSpPr>
         <p:spPr>
           <a:xfrm>
-            <a:off x="838200" y="3826510"/>
+            <a:off x="838200" y="3619119"/>
             <a:ext cx="10769600" cy="207391"/>
           </a:xfrm>
           <a:prstGeom prst="rect">
@@ -10012,7 +9988,7 @@
         </p:nvSpPr>
         <p:spPr>
           <a:xfrm>
-            <a:off x="635000" y="4065651"/>
+            <a:off x="635000" y="3858260"/>
             <a:ext cx="203200" cy="207391"/>
           </a:xfrm>
           <a:prstGeom prst="rect">
@@ -10059,7 +10035,7 @@
         </p:nvSpPr>
         <p:spPr>
           <a:xfrm>
-            <a:off x="838200" y="4065651"/>
+            <a:off x="838200" y="3858260"/>
             <a:ext cx="10769600" cy="207391"/>
           </a:xfrm>
           <a:prstGeom prst="rect">
@@ -10106,7 +10082,7 @@
         </p:nvSpPr>
         <p:spPr>
           <a:xfrm>
-            <a:off x="635000" y="4304792"/>
+            <a:off x="635000" y="4097401"/>
             <a:ext cx="203200" cy="207391"/>
           </a:xfrm>
           <a:prstGeom prst="rect">
@@ -10153,7 +10129,7 @@
         </p:nvSpPr>
         <p:spPr>
           <a:xfrm>
-            <a:off x="838200" y="4304792"/>
+            <a:off x="838200" y="4097401"/>
             <a:ext cx="10769600" cy="207391"/>
           </a:xfrm>
           <a:prstGeom prst="rect">
@@ -10200,7 +10176,7 @@
         </p:nvSpPr>
         <p:spPr>
           <a:xfrm>
-            <a:off x="635000" y="4543933"/>
+            <a:off x="635000" y="4336542"/>
             <a:ext cx="203200" cy="207391"/>
           </a:xfrm>
           <a:prstGeom prst="rect">
@@ -10247,7 +10223,7 @@
         </p:nvSpPr>
         <p:spPr>
           <a:xfrm>
-            <a:off x="838200" y="4543933"/>
+            <a:off x="838200" y="4336542"/>
             <a:ext cx="10769600" cy="207391"/>
           </a:xfrm>
           <a:prstGeom prst="rect">
@@ -10328,7 +10304,7 @@
                 <a:ea typeface="Malgun Gothic"/>
                 <a:cs typeface="Malgun Gothic"/>
               </a:rPr>
-              <a:t>© HANWHA SYSTEMS ICT · IT-SW-001 · 사내 일반</a:t>
+              <a:t>© 가상 ICT 기업 · IT-SW-001 · 사내 일반</a:t>
             </a:r>
           </a:p>
         </p:txBody>
@@ -10914,7 +10890,7 @@
                 <a:ea typeface="Malgun Gothic"/>
                 <a:cs typeface="Malgun Gothic"/>
               </a:rPr>
-              <a:t>© HANWHA SYSTEMS ICT · IT-SW-001 · 사내 일반</a:t>
+              <a:t>© 가상 ICT 기업 · IT-SW-001 · 사내 일반</a:t>
             </a:r>
           </a:p>
         </p:txBody>
@@ -11547,7 +11523,7 @@
                 <a:ea typeface="Malgun Gothic"/>
                 <a:cs typeface="Malgun Gothic"/>
               </a:rPr>
-              <a:t>© HANWHA SYSTEMS ICT · IT-SW-001 · 사내 일반</a:t>
+              <a:t>© 가상 ICT 기업 · IT-SW-001 · 사내 일반</a:t>
             </a:r>
           </a:p>
         </p:txBody>
@@ -13917,7 +13893,7 @@
                 <a:ea typeface="Malgun Gothic"/>
                 <a:cs typeface="Malgun Gothic"/>
               </a:rPr>
-              <a:t>© HANWHA SYSTEMS ICT · IT-SW-001 · 사내 일반</a:t>
+              <a:t>© 가상 ICT 기업 · IT-SW-001 · 사내 일반</a:t>
             </a:r>
           </a:p>
         </p:txBody>
@@ -15705,7 +15681,7 @@
                 <a:ea typeface="Malgun Gothic"/>
                 <a:cs typeface="Malgun Gothic"/>
               </a:rPr>
-              <a:t>© HANWHA SYSTEMS ICT · IT-SW-001 · 사내 일반</a:t>
+              <a:t>© 가상 ICT 기업 · IT-SW-001 · 사내 일반</a:t>
             </a:r>
           </a:p>
         </p:txBody>
@@ -16787,7 +16763,7 @@
                 <a:ea typeface="Malgun Gothic"/>
                 <a:cs typeface="Malgun Gothic"/>
               </a:rPr>
-              <a:t>© HANWHA SYSTEMS ICT · IT-SW-001 · 사내 일반</a:t>
+              <a:t>© 가상 ICT 기업 · IT-SW-001 · 사내 일반</a:t>
             </a:r>
           </a:p>
         </p:txBody>
@@ -18342,7 +18318,7 @@
                 <a:ea typeface="Malgun Gothic"/>
                 <a:cs typeface="Malgun Gothic"/>
               </a:rPr>
-              <a:t>© HANWHA SYSTEMS ICT · IT-SW-001 · 사내 일반</a:t>
+              <a:t>© 가상 ICT 기업 · IT-SW-001 · 사내 일반</a:t>
             </a:r>
           </a:p>
         </p:txBody>
@@ -20147,7 +20123,7 @@
                 <a:ea typeface="Malgun Gothic"/>
                 <a:cs typeface="Malgun Gothic"/>
               </a:rPr>
-              <a:t>© HANWHA SYSTEMS ICT · IT-SW-001 · 사내 일반</a:t>
+              <a:t>© 가상 ICT 기업 · IT-SW-001 · 사내 일반</a:t>
             </a:r>
           </a:p>
         </p:txBody>
@@ -21865,7 +21841,7 @@
                 <a:ea typeface="Malgun Gothic"/>
                 <a:cs typeface="Malgun Gothic"/>
               </a:rPr>
-              <a:t>© HANWHA SYSTEMS ICT · IT-SW-001 · 사내 일반</a:t>
+              <a:t>© 가상 ICT 기업 · IT-SW-001 · 사내 일반</a:t>
             </a:r>
           </a:p>
         </p:txBody>
@@ -23603,7 +23579,7 @@
                 <a:ea typeface="Malgun Gothic"/>
                 <a:cs typeface="Malgun Gothic"/>
               </a:rPr>
-              <a:t>© HANWHA SYSTEMS ICT · IT-SW-001 · 사내 일반</a:t>
+              <a:t>© 가상 ICT 기업 · IT-SW-001 · 사내 일반</a:t>
             </a:r>
           </a:p>
         </p:txBody>
@@ -24803,7 +24779,7 @@
                 <a:ea typeface="Malgun Gothic"/>
                 <a:cs typeface="Malgun Gothic"/>
               </a:rPr>
-              <a:t>© HANWHA SYSTEMS ICT · IT-SW-001 · 사내 일반</a:t>
+              <a:t>© 가상 ICT 기업 · IT-SW-001 · 사내 일반</a:t>
             </a:r>
           </a:p>
         </p:txBody>
@@ -26748,7 +26724,7 @@
                 <a:ea typeface="Malgun Gothic"/>
                 <a:cs typeface="Malgun Gothic"/>
               </a:rPr>
-              <a:t>© HANWHA SYSTEMS ICT · IT-SW-001 · 사내 일반</a:t>
+              <a:t>© 가상 ICT 기업 · IT-SW-001 · 사내 일반</a:t>
             </a:r>
           </a:p>
         </p:txBody>
@@ -27381,7 +27357,7 @@
                 <a:ea typeface="Malgun Gothic"/>
                 <a:cs typeface="Malgun Gothic"/>
               </a:rPr>
-              <a:t>© HANWHA SYSTEMS ICT · IT-SW-001 · 사내 일반</a:t>
+              <a:t>© 가상 ICT 기업 · IT-SW-001 · 사내 일반</a:t>
             </a:r>
           </a:p>
         </p:txBody>
@@ -30027,7 +30003,7 @@
                 <a:ea typeface="Malgun Gothic"/>
                 <a:cs typeface="Malgun Gothic"/>
               </a:rPr>
-              <a:t>© HANWHA SYSTEMS ICT · IT-SW-001 · 사내 일반</a:t>
+              <a:t>© 가상 ICT 기업 · IT-SW-001 · 사내 일반</a:t>
             </a:r>
           </a:p>
         </p:txBody>
@@ -31439,7 +31415,7 @@
                 <a:ea typeface="Malgun Gothic"/>
                 <a:cs typeface="Malgun Gothic"/>
               </a:rPr>
-              <a:t>© HANWHA SYSTEMS ICT · IT-SW-001 · 사내 일반</a:t>
+              <a:t>© 가상 ICT 기업 · IT-SW-001 · 사내 일반</a:t>
             </a:r>
           </a:p>
         </p:txBody>
@@ -33135,7 +33111,7 @@
                 <a:ea typeface="Malgun Gothic"/>
                 <a:cs typeface="Malgun Gothic"/>
               </a:rPr>
-              <a:t>© HANWHA SYSTEMS ICT · IT-SW-001 · 사내 일반</a:t>
+              <a:t>© 가상 ICT 기업 · IT-SW-001 · 사내 일반</a:t>
             </a:r>
           </a:p>
         </p:txBody>
@@ -34147,7 +34123,7 @@
                 <a:ea typeface="Malgun Gothic"/>
                 <a:cs typeface="Malgun Gothic"/>
               </a:rPr>
-              <a:t>© HANWHA SYSTEMS ICT · IT-SW-001 · 사내 일반</a:t>
+              <a:t>© 가상 ICT 기업 · IT-SW-001 · 사내 일반</a:t>
             </a:r>
           </a:p>
         </p:txBody>
@@ -35879,7 +35855,7 @@
                           <a:ea typeface="Malgun Gothic"/>
                           <a:cs typeface="Malgun Gothic"/>
                         </a:rPr>
-                        <a:t>사내망(유선·hanwha-office) 또는 VPN 연결 확인 → 새로 고침</a:t>
+                        <a:t>사내망(유선·ict-office) 또는 VPN 연결 확인 → 새로 고침</a:t>
                       </a:r>
                     </a:p>
                   </a:txBody>
@@ -36068,7 +36044,7 @@
                 <a:ea typeface="Malgun Gothic"/>
                 <a:cs typeface="Malgun Gothic"/>
               </a:rPr>
-              <a:t>© HANWHA SYSTEMS ICT · IT-SW-001 · 사내 일반</a:t>
+              <a:t>© 가상 ICT 기업 · IT-SW-001 · 사내 일반</a:t>
             </a:r>
           </a:p>
         </p:txBody>
@@ -37344,7 +37320,7 @@
                 <a:ea typeface="Malgun Gothic"/>
                 <a:cs typeface="Malgun Gothic"/>
               </a:rPr>
-              <a:t>© HANWHA SYSTEMS ICT · IT-SW-001 · 사내 일반</a:t>
+              <a:t>© 가상 ICT 기업 · IT-SW-001 · 사내 일반</a:t>
             </a:r>
           </a:p>
         </p:txBody>
@@ -38662,7 +38638,7 @@
                 <a:ea typeface="Malgun Gothic"/>
                 <a:cs typeface="Malgun Gothic"/>
               </a:rPr>
-              <a:t>© HANWHA SYSTEMS ICT · IT-SW-001 · 사내 일반</a:t>
+              <a:t>© 가상 ICT 기업 · IT-SW-001 · 사내 일반</a:t>
             </a:r>
           </a:p>
         </p:txBody>
@@ -38910,7 +38886,7 @@
                 <a:ea typeface="Malgun Gothic"/>
                 <a:cs typeface="Malgun Gothic"/>
               </a:rPr>
-              <a:t>© HANWHA SYSTEMS ICT · IT-SW-001 · 사내 일반</a:t>
+              <a:t>© 가상 ICT 기업 · IT-SW-001 · 사내 일반</a:t>
             </a:r>
           </a:p>
         </p:txBody>
@@ -39851,7 +39827,7 @@
                 <a:ea typeface="Malgun Gothic"/>
                 <a:cs typeface="Malgun Gothic"/>
               </a:rPr>
-              <a:t>© HANWHA SYSTEMS ICT · IT-SW-001 · 사내 일반</a:t>
+              <a:t>© 가상 ICT 기업 · IT-SW-001 · 사내 일반</a:t>
             </a:r>
           </a:p>
         </p:txBody>
@@ -40099,7 +40075,7 @@
                 <a:ea typeface="Malgun Gothic"/>
                 <a:cs typeface="Malgun Gothic"/>
               </a:rPr>
-              <a:t>© HANWHA SYSTEMS ICT · IT-SW-001 · 사내 일반</a:t>
+              <a:t>© 가상 ICT 기업 · IT-SW-001 · 사내 일반</a:t>
             </a:r>
           </a:p>
         </p:txBody>
@@ -40850,7 +40826,7 @@
                 <a:ea typeface="Malgun Gothic"/>
                 <a:cs typeface="Malgun Gothic"/>
               </a:rPr>
-              <a:t>© HANWHA SYSTEMS ICT · IT-SW-001 · 사내 일반</a:t>
+              <a:t>© 가상 ICT 기업 · IT-SW-001 · 사내 일반</a:t>
             </a:r>
           </a:p>
         </p:txBody>
@@ -41098,7 +41074,7 @@
                 <a:ea typeface="Malgun Gothic"/>
                 <a:cs typeface="Malgun Gothic"/>
               </a:rPr>
-              <a:t>© HANWHA SYSTEMS ICT · IT-SW-001 · 사내 일반</a:t>
+              <a:t>© 가상 ICT 기업 · IT-SW-001 · 사내 일반</a:t>
             </a:r>
           </a:p>
         </p:txBody>
@@ -41610,7 +41586,7 @@
                           <a:ea typeface="Malgun Gothic"/>
                           <a:cs typeface="Malgun Gothic"/>
                         </a:rPr>
-                        <a:t>사내 IT 포털(hanwha-admin) 상단 [챗봇 문의]</a:t>
+                        <a:t>사내 IT 포털 상단 [챗봇 문의]</a:t>
                       </a:r>
                     </a:p>
                   </a:txBody>
@@ -42302,7 +42278,7 @@
                           <a:ea typeface="Malgun Gothic"/>
                           <a:cs typeface="Malgun Gothic"/>
                         </a:rPr>
-                        <a:t>it-helpdesk@hanwha-ict.example</a:t>
+                        <a:t>it-helpdesk@ict.example</a:t>
                       </a:r>
                     </a:p>
                   </a:txBody>
@@ -42601,7 +42577,7 @@
                 <a:ea typeface="Malgun Gothic"/>
                 <a:cs typeface="Malgun Gothic"/>
               </a:rPr>
-              <a:t>© HANWHA SYSTEMS ICT · IT-SW-001 · 사내 일반</a:t>
+              <a:t>© 가상 ICT 기업 · IT-SW-001 · 사내 일반</a:t>
             </a:r>
           </a:p>
         </p:txBody>
@@ -42849,7 +42825,7 @@
                 <a:ea typeface="Malgun Gothic"/>
                 <a:cs typeface="Malgun Gothic"/>
               </a:rPr>
-              <a:t>© HANWHA SYSTEMS ICT · IT-SW-001 · 사내 일반</a:t>
+              <a:t>© 가상 ICT 기업 · IT-SW-001 · 사내 일반</a:t>
             </a:r>
           </a:p>
         </p:txBody>
@@ -44373,7 +44349,7 @@
                           <a:ea typeface="Malgun Gothic"/>
                           <a:cs typeface="Malgun Gothic"/>
                         </a:rPr>
-                        <a:t>사내 IT 포털 (hanwha-admin)</a:t>
+                        <a:t>사내 IT 포털</a:t>
                       </a:r>
                     </a:p>
                   </a:txBody>
@@ -44953,7 +44929,7 @@
                 <a:ea typeface="Malgun Gothic"/>
                 <a:cs typeface="Malgun Gothic"/>
               </a:rPr>
-              <a:t>© HANWHA SYSTEMS ICT · IT-SW-001 · 사내 일반</a:t>
+              <a:t>© 가상 ICT 기업 · IT-SW-001 · 사내 일반</a:t>
             </a:r>
           </a:p>
         </p:txBody>
@@ -45930,7 +45906,7 @@
                 <a:ea typeface="Malgun Gothic"/>
                 <a:cs typeface="Malgun Gothic"/>
               </a:rPr>
-              <a:t>© HANWHA SYSTEMS ICT · IT-SW-001 · 사내 일반</a:t>
+              <a:t>© 가상 ICT 기업 · IT-SW-001 · 사내 일반</a:t>
             </a:r>
           </a:p>
         </p:txBody>
@@ -46178,7 +46154,7 @@
                 <a:ea typeface="Malgun Gothic"/>
                 <a:cs typeface="Malgun Gothic"/>
               </a:rPr>
-              <a:t>© HANWHA SYSTEMS ICT · IT-SW-001 · 사내 일반</a:t>
+              <a:t>© 가상 ICT 기업 · IT-SW-001 · 사내 일반</a:t>
             </a:r>
           </a:p>
         </p:txBody>
@@ -47355,7 +47331,7 @@
                 <a:ea typeface="Malgun Gothic"/>
                 <a:cs typeface="Malgun Gothic"/>
               </a:rPr>
-              <a:t>사내 IT 포털(hanwha-admin) &gt; 소프트웨어 센터</a:t>
+              <a:t>사내 IT 포털 &gt; 소프트웨어 센터</a:t>
             </a:r>
           </a:p>
         </p:txBody>
@@ -47590,7 +47566,7 @@
                 <a:ea typeface="Malgun Gothic"/>
                 <a:cs typeface="Malgun Gothic"/>
               </a:rPr>
-              <a:t>© HANWHA SYSTEMS ICT · IT-SW-001 · 사내 일반</a:t>
+              <a:t>© 가상 ICT 기업 · IT-SW-001 · 사내 일반</a:t>
             </a:r>
           </a:p>
         </p:txBody>
@@ -47838,7 +47814,7 @@
                 <a:ea typeface="Malgun Gothic"/>
                 <a:cs typeface="Malgun Gothic"/>
               </a:rPr>
-              <a:t>© HANWHA SYSTEMS ICT · IT-SW-001 · 사내 일반</a:t>
+              <a:t>© 가상 ICT 기업 · IT-SW-001 · 사내 일반</a:t>
             </a:r>
           </a:p>
         </p:txBody>
@@ -50860,7 +50836,7 @@
                 <a:ea typeface="Malgun Gothic"/>
                 <a:cs typeface="Malgun Gothic"/>
               </a:rPr>
-              <a:t>© HANWHA SYSTEMS ICT · IT-SW-001 · 사내 일반</a:t>
+              <a:t>© 가상 ICT 기업 · IT-SW-001 · 사내 일반</a:t>
             </a:r>
           </a:p>
         </p:txBody>
@@ -51190,7 +51166,7 @@
                 <a:ea typeface="Malgun Gothic"/>
                 <a:cs typeface="Malgun Gothic"/>
               </a:rPr>
-              <a:t>사내 IT 포털(hanwha-admin) &gt; [소프트웨어 센터]에서 프로그램 이름을 검색하고, 오른쪽 단추 모양을 봅니다.</a:t>
+              <a:t>사내 IT 포털 &gt; [소프트웨어 센터]에서 프로그램 이름을 검색하고, 오른쪽 단추 모양을 봅니다.</a:t>
             </a:r>
           </a:p>
         </p:txBody>
@@ -52070,7 +52046,7 @@
                 <a:ea typeface="Malgun Gothic"/>
                 <a:cs typeface="Malgun Gothic"/>
               </a:rPr>
-              <a:t>© HANWHA SYSTEMS ICT · IT-SW-001 · 사내 일반</a:t>
+              <a:t>© 가상 ICT 기업 · IT-SW-001 · 사내 일반</a:t>
             </a:r>
           </a:p>
         </p:txBody>
@@ -53321,7 +53297,7 @@
                           <a:ea typeface="Malgun Gothic"/>
                           <a:cs typeface="Malgun Gothic"/>
                         </a:rPr>
-                        <a:t>사내망(유선·hanwha-office Wi-Fi) 또는 VPN 연결 상태</a:t>
+                        <a:t>사내망(유선·ict-office Wi-Fi) 또는 VPN 연결 상태</a:t>
                       </a:r>
                     </a:p>
                   </a:txBody>
@@ -54553,7 +54529,7 @@
                 <a:ea typeface="Malgun Gothic"/>
                 <a:cs typeface="Malgun Gothic"/>
               </a:rPr>
-              <a:t>© HANWHA SYSTEMS ICT · IT-SW-001 · 사내 일반</a:t>
+              <a:t>© 가상 ICT 기업 · IT-SW-001 · 사내 일반</a:t>
             </a:r>
           </a:p>
         </p:txBody>
